--- a/docs/content/regression/regression_lecture.pptx
+++ b/docs/content/regression/regression_lecture.pptx
@@ -3314,7 +3314,7 @@
             </a:pPr>
             <a:r>
               <a:rPr/>
-              <a:t>Lecture 06 — Linear Regression</a:t>
+              <a:t>Lecture 11 — Linear Regression</a:t>
             </a:r>
           </a:p>
         </p:txBody>
@@ -3375,7 +3375,7 @@
             </a:pPr>
             <a:r>
               <a:rPr/>
-              <a:t>2026-07-05</a:t>
+              <a:t>2026-08-27</a:t>
             </a:r>
           </a:p>
         </p:txBody>
@@ -4163,8 +4163,14 @@
                         <a:buNone/>
                       </a:pPr>
                       <a:r>
+                        <a:rPr>
+                          <a:latin typeface="Courier"/>
+                        </a:rPr>
+                        <a:t>plot(model)</a:t>
+                      </a:r>
+                      <a:r>
                         <a:rPr/>
-                        <a:t>Residual vs. fitted plot</a:t>
+                        <a:t>, panel 1</a:t>
                       </a:r>
                     </a:p>
                   </a:txBody>
@@ -4265,8 +4271,14 @@
                         <a:buNone/>
                       </a:pPr>
                       <a:r>
+                        <a:rPr>
+                          <a:latin typeface="Courier"/>
+                        </a:rPr>
+                        <a:t>plot(model)</a:t>
+                      </a:r>
+                      <a:r>
                         <a:rPr/>
-                        <a:t>Residual vs. fitted plot</a:t>
+                        <a:t>, panels 1 &amp; 3</a:t>
                       </a:r>
                     </a:p>
                   </a:txBody>
@@ -4316,8 +4328,14 @@
                         <a:buNone/>
                       </a:pPr>
                       <a:r>
+                        <a:rPr>
+                          <a:latin typeface="Courier"/>
+                        </a:rPr>
+                        <a:t>plot(model)</a:t>
+                      </a:r>
+                      <a:r>
                         <a:rPr/>
-                        <a:t>QQ plot + Shapiro-Wilk</a:t>
+                        <a:t>, panel 2 + Shapiro-Wilk</a:t>
                       </a:r>
                     </a:p>
                   </a:txBody>
@@ -4382,7 +4400,27 @@
             </a:pPr>
             <a:r>
               <a:rPr sz="2000"/>
-              <a:t>A well-fitted residual plot looks like a random horizontal cloud of points centered at zero — no curves, no funnel shapes.</a:t>
+              <a:t>R builds these diagnostic plots for you the instant you fit a model — </a:t>
+            </a:r>
+            <a:r>
+              <a:rPr sz="2000">
+                <a:latin typeface="Courier"/>
+              </a:rPr>
+              <a:t>plot()</a:t>
+            </a:r>
+            <a:r>
+              <a:rPr sz="2000"/>
+              <a:t> on any </a:t>
+            </a:r>
+            <a:r>
+              <a:rPr sz="2000">
+                <a:latin typeface="Courier"/>
+              </a:rPr>
+              <a:t>lm</a:t>
+            </a:r>
+            <a:r>
+              <a:rPr sz="2000"/>
+              <a:t> object gives you all four in one call.</a:t>
             </a:r>
           </a:p>
           <a:p>
@@ -6832,7 +6870,11 @@
               <a:rPr>
                 <a:latin typeface="Courier"/>
               </a:rPr>
-              <a:t>lm() - Linear Model</a:t>
+              <a:t>lm()</a:t>
+            </a:r>
+            <a:r>
+              <a:rPr/>
+              <a:t> — the Linear Model Function</a:t>
             </a:r>
           </a:p>
         </p:txBody>
@@ -7254,7 +7296,7 @@
             </a:pPr>
             <a:r>
               <a:rPr/>
-              <a:t>Where we left off (Lecture 05)</a:t>
+              <a:t>Where we left off (Lectures 07, 09–10)</a:t>
             </a:r>
           </a:p>
         </p:txBody>
@@ -7406,7 +7448,7 @@
             <a:pPr lvl="0"/>
             <a:r>
               <a:rPr b="1"/>
-              <a:t>Carried forward (Lecture 04)</a:t>
+              <a:t>Carried forward (Lectures 09–10)</a:t>
             </a:r>
             <a:r>
               <a:rPr/>
@@ -9240,7 +9282,7 @@
             </a:r>
             <a:r>
               <a:rPr/>
-              <a:t> the calibration curve with its CI band, the residuals-vs-fitted plot, and the QQ plot + Shapiro-Wilk on the residuals.</a:t>
+              <a:t> the calibration curve with its CI band, and the four base R diagnostic plots + Shapiro-Wilk on the residuals.</a:t>
             </a:r>
           </a:p>
           <a:p>
@@ -9262,7 +9304,17 @@
             </a:r>
             <a:r>
               <a:rPr sz="2000"/>
-              <a:t> (plot the curve; check the residual and QQ/Shapiro assumptions).</a:t>
+              <a:t> (plot the curve; check </a:t>
+            </a:r>
+            <a:r>
+              <a:rPr sz="2000">
+                <a:latin typeface="Courier"/>
+              </a:rPr>
+              <a:t>plot(model)</a:t>
+            </a:r>
+            <a:r>
+              <a:rPr sz="2000"/>
+              <a:t> and Shapiro-Wilk).</a:t>
             </a:r>
           </a:p>
         </p:txBody>
@@ -9720,7 +9772,7 @@
                 </a:solidFill>
                 <a:latin typeface="Courier"/>
               </a:rPr>
-              <a:t>"steelblue"</a:t>
+              <a:t>"darkblue"</a:t>
             </a:r>
             <a:r>
               <a:rPr>
@@ -10450,7 +10502,7 @@
             </a:pPr>
             <a:r>
               <a:rPr/>
-              <a:t>Check Assumptions — Residual Plot</a:t>
+              <a:t>Check Assumptions — the Base R Diagnostic Plots</a:t>
             </a:r>
           </a:p>
         </p:txBody>
@@ -10488,7 +10540,17 @@
             </a:r>
             <a:r>
               <a:rPr sz="2000"/>
-              <a:t> If the line fits well, what should the residuals-vs-fitted plot look like — a random flat cloud, a curve, or a funnel? Predict, then look.</a:t>
+              <a:t> </a:t>
+            </a:r>
+            <a:r>
+              <a:rPr sz="2000">
+                <a:latin typeface="Courier"/>
+              </a:rPr>
+              <a:t>plot()</a:t>
+            </a:r>
+            <a:r>
+              <a:rPr sz="2000"/>
+              <a:t> on a fitted model gives you four panels at once. One of them is a QQ plot — what do you predict the other three will show?</a:t>
             </a:r>
           </a:p>
         </p:txBody>
@@ -10540,157 +10602,108 @@
                 </a:solidFill>
                 <a:latin typeface="Courier"/>
               </a:rPr>
-              <a:t># mutate() adds new columns to the data frame ----------</a:t>
+              <a:t># plot() on an lm object gives all four diagnostics -----</a:t>
             </a:r>
             <a:br/>
             <a:r>
               <a:rPr>
                 <a:solidFill>
-                  <a:srgbClr val="5E5E5E"/>
-                </a:solidFill>
-                <a:latin typeface="Courier"/>
-              </a:rPr>
-              <a:t># Here we add the model's fitted values and residuals</a:t>
+                  <a:srgbClr val="4758AB"/>
+                </a:solidFill>
+                <a:latin typeface="Courier"/>
+              </a:rPr>
+              <a:t>par</a:t>
+            </a:r>
+            <a:r>
+              <a:rPr>
+                <a:solidFill>
+                  <a:srgbClr val="003B4F"/>
+                </a:solidFill>
+                <a:latin typeface="Courier"/>
+              </a:rPr>
+              <a:t>(</a:t>
+            </a:r>
+            <a:r>
+              <a:rPr>
+                <a:solidFill>
+                  <a:srgbClr val="657422"/>
+                </a:solidFill>
+                <a:latin typeface="Courier"/>
+              </a:rPr>
+              <a:t>mfrow =</a:t>
+            </a:r>
+            <a:r>
+              <a:rPr>
+                <a:solidFill>
+                  <a:srgbClr val="003B4F"/>
+                </a:solidFill>
+                <a:latin typeface="Courier"/>
+              </a:rPr>
+              <a:t> </a:t>
+            </a:r>
+            <a:r>
+              <a:rPr>
+                <a:solidFill>
+                  <a:srgbClr val="4758AB"/>
+                </a:solidFill>
+                <a:latin typeface="Courier"/>
+              </a:rPr>
+              <a:t>c</a:t>
+            </a:r>
+            <a:r>
+              <a:rPr>
+                <a:solidFill>
+                  <a:srgbClr val="003B4F"/>
+                </a:solidFill>
+                <a:latin typeface="Courier"/>
+              </a:rPr>
+              <a:t>(</a:t>
+            </a:r>
+            <a:r>
+              <a:rPr>
+                <a:solidFill>
+                  <a:srgbClr val="AD0000"/>
+                </a:solidFill>
+                <a:latin typeface="Courier"/>
+              </a:rPr>
+              <a:t>2</a:t>
+            </a:r>
+            <a:r>
+              <a:rPr>
+                <a:solidFill>
+                  <a:srgbClr val="003B4F"/>
+                </a:solidFill>
+                <a:latin typeface="Courier"/>
+              </a:rPr>
+              <a:t>, </a:t>
+            </a:r>
+            <a:r>
+              <a:rPr>
+                <a:solidFill>
+                  <a:srgbClr val="AD0000"/>
+                </a:solidFill>
+                <a:latin typeface="Courier"/>
+              </a:rPr>
+              <a:t>2</a:t>
+            </a:r>
+            <a:r>
+              <a:rPr>
+                <a:solidFill>
+                  <a:srgbClr val="003B4F"/>
+                </a:solidFill>
+                <a:latin typeface="Courier"/>
+              </a:rPr>
+              <a:t>))</a:t>
             </a:r>
             <a:br/>
             <a:r>
               <a:rPr>
                 <a:solidFill>
-                  <a:srgbClr val="5E5E5E"/>
-                </a:solidFill>
-                <a:latin typeface="Courier"/>
-              </a:rPr>
-              <a:t># so we can plot them — recall mutate() from Lecture 03!</a:t>
-            </a:r>
-            <a:br/>
-            <a:r>
-              <a:rPr>
-                <a:solidFill>
-                  <a:srgbClr val="003B4F"/>
-                </a:solidFill>
-                <a:latin typeface="Courier"/>
-              </a:rPr>
-              <a:t>paper_resid_df &lt;- paper_df </a:t>
-            </a:r>
-            <a:r>
-              <a:rPr>
-                <a:solidFill>
-                  <a:srgbClr val="5E5E5E"/>
-                </a:solidFill>
-                <a:latin typeface="Courier"/>
-              </a:rPr>
-              <a:t>%&gt;%</a:t>
-            </a:r>
-            <a:br/>
-            <a:r>
-              <a:rPr>
-                <a:solidFill>
-                  <a:srgbClr val="003B4F"/>
-                </a:solidFill>
-                <a:latin typeface="Courier"/>
-              </a:rPr>
-              <a:t>  </a:t>
-            </a:r>
-            <a:r>
-              <a:rPr>
-                <a:solidFill>
                   <a:srgbClr val="4758AB"/>
                 </a:solidFill>
                 <a:latin typeface="Courier"/>
               </a:rPr>
-              <a:t>mutate</a:t>
-            </a:r>
-            <a:r>
-              <a:rPr>
-                <a:solidFill>
-                  <a:srgbClr val="003B4F"/>
-                </a:solidFill>
-                <a:latin typeface="Courier"/>
-              </a:rPr>
-              <a:t>(</a:t>
-            </a:r>
-            <a:br/>
-            <a:r>
-              <a:rPr>
-                <a:solidFill>
-                  <a:srgbClr val="003B4F"/>
-                </a:solidFill>
-                <a:latin typeface="Courier"/>
-              </a:rPr>
-              <a:t>    </a:t>
-            </a:r>
-            <a:r>
-              <a:rPr>
-                <a:solidFill>
-                  <a:srgbClr val="657422"/>
-                </a:solidFill>
-                <a:latin typeface="Courier"/>
-              </a:rPr>
-              <a:t>fitted =</a:t>
-            </a:r>
-            <a:r>
-              <a:rPr>
-                <a:solidFill>
-                  <a:srgbClr val="003B4F"/>
-                </a:solidFill>
-                <a:latin typeface="Courier"/>
-              </a:rPr>
-              <a:t> </a:t>
-            </a:r>
-            <a:r>
-              <a:rPr>
-                <a:solidFill>
-                  <a:srgbClr val="4758AB"/>
-                </a:solidFill>
-                <a:latin typeface="Courier"/>
-              </a:rPr>
-              <a:t>fitted</a:t>
-            </a:r>
-            <a:r>
-              <a:rPr>
-                <a:solidFill>
-                  <a:srgbClr val="003B4F"/>
-                </a:solidFill>
-                <a:latin typeface="Courier"/>
-              </a:rPr>
-              <a:t>(paper_lm_model),</a:t>
-            </a:r>
-            <a:br/>
-            <a:r>
-              <a:rPr>
-                <a:solidFill>
-                  <a:srgbClr val="003B4F"/>
-                </a:solidFill>
-                <a:latin typeface="Courier"/>
-              </a:rPr>
-              <a:t>    </a:t>
-            </a:r>
-            <a:r>
-              <a:rPr>
-                <a:solidFill>
-                  <a:srgbClr val="657422"/>
-                </a:solidFill>
-                <a:latin typeface="Courier"/>
-              </a:rPr>
-              <a:t>residuals =</a:t>
-            </a:r>
-            <a:r>
-              <a:rPr>
-                <a:solidFill>
-                  <a:srgbClr val="003B4F"/>
-                </a:solidFill>
-                <a:latin typeface="Courier"/>
-              </a:rPr>
-              <a:t> </a:t>
-            </a:r>
-            <a:r>
-              <a:rPr>
-                <a:solidFill>
-                  <a:srgbClr val="4758AB"/>
-                </a:solidFill>
-                <a:latin typeface="Courier"/>
-              </a:rPr>
-              <a:t>residuals</a:t>
+              <a:t>plot</a:t>
             </a:r>
             <a:r>
               <a:rPr>
@@ -10700,513 +10713,13 @@
                 <a:latin typeface="Courier"/>
               </a:rPr>
               <a:t>(paper_lm_model)</a:t>
-            </a:r>
-            <a:br/>
-            <a:r>
-              <a:rPr>
-                <a:solidFill>
-                  <a:srgbClr val="003B4F"/>
-                </a:solidFill>
-                <a:latin typeface="Courier"/>
-              </a:rPr>
-              <a:t>  )</a:t>
-            </a:r>
-          </a:p>
-          <a:p>
-            <a:pPr lvl="0" indent="0">
-              <a:buNone/>
-            </a:pPr>
-            <a:r>
-              <a:rPr>
-                <a:solidFill>
-                  <a:srgbClr val="5E5E5E"/>
-                </a:solidFill>
-                <a:latin typeface="Courier"/>
-              </a:rPr>
-              <a:t># Residuals vs Fitted — checks linearity &amp; equal variance</a:t>
-            </a:r>
-            <a:br/>
-            <a:r>
-              <a:rPr>
-                <a:solidFill>
-                  <a:srgbClr val="003B4F"/>
-                </a:solidFill>
-                <a:latin typeface="Courier"/>
-              </a:rPr>
-              <a:t>resid_plot &lt;- paper_resid_df </a:t>
-            </a:r>
-            <a:r>
-              <a:rPr>
-                <a:solidFill>
-                  <a:srgbClr val="5E5E5E"/>
-                </a:solidFill>
-                <a:latin typeface="Courier"/>
-              </a:rPr>
-              <a:t>%&gt;%</a:t>
-            </a:r>
-            <a:br/>
-            <a:r>
-              <a:rPr>
-                <a:solidFill>
-                  <a:srgbClr val="003B4F"/>
-                </a:solidFill>
-                <a:latin typeface="Courier"/>
-              </a:rPr>
-              <a:t>  </a:t>
-            </a:r>
-            <a:r>
-              <a:rPr>
-                <a:solidFill>
-                  <a:srgbClr val="4758AB"/>
-                </a:solidFill>
-                <a:latin typeface="Courier"/>
-              </a:rPr>
-              <a:t>ggplot</a:t>
-            </a:r>
-            <a:r>
-              <a:rPr>
-                <a:solidFill>
-                  <a:srgbClr val="003B4F"/>
-                </a:solidFill>
-                <a:latin typeface="Courier"/>
-              </a:rPr>
-              <a:t>(</a:t>
-            </a:r>
-            <a:r>
-              <a:rPr>
-                <a:solidFill>
-                  <a:srgbClr val="4758AB"/>
-                </a:solidFill>
-                <a:latin typeface="Courier"/>
-              </a:rPr>
-              <a:t>aes</a:t>
-            </a:r>
-            <a:r>
-              <a:rPr>
-                <a:solidFill>
-                  <a:srgbClr val="003B4F"/>
-                </a:solidFill>
-                <a:latin typeface="Courier"/>
-              </a:rPr>
-              <a:t>(</a:t>
-            </a:r>
-            <a:r>
-              <a:rPr>
-                <a:solidFill>
-                  <a:srgbClr val="657422"/>
-                </a:solidFill>
-                <a:latin typeface="Courier"/>
-              </a:rPr>
-              <a:t>x =</a:t>
-            </a:r>
-            <a:r>
-              <a:rPr>
-                <a:solidFill>
-                  <a:srgbClr val="003B4F"/>
-                </a:solidFill>
-                <a:latin typeface="Courier"/>
-              </a:rPr>
-              <a:t> fitted, </a:t>
-            </a:r>
-            <a:r>
-              <a:rPr>
-                <a:solidFill>
-                  <a:srgbClr val="657422"/>
-                </a:solidFill>
-                <a:latin typeface="Courier"/>
-              </a:rPr>
-              <a:t>y =</a:t>
-            </a:r>
-            <a:r>
-              <a:rPr>
-                <a:solidFill>
-                  <a:srgbClr val="003B4F"/>
-                </a:solidFill>
-                <a:latin typeface="Courier"/>
-              </a:rPr>
-              <a:t> residuals)) </a:t>
-            </a:r>
-            <a:r>
-              <a:rPr>
-                <a:solidFill>
-                  <a:srgbClr val="5E5E5E"/>
-                </a:solidFill>
-                <a:latin typeface="Courier"/>
-              </a:rPr>
-              <a:t>+</a:t>
-            </a:r>
-            <a:br/>
-            <a:r>
-              <a:rPr>
-                <a:solidFill>
-                  <a:srgbClr val="003B4F"/>
-                </a:solidFill>
-                <a:latin typeface="Courier"/>
-              </a:rPr>
-              <a:t>  </a:t>
-            </a:r>
-            <a:r>
-              <a:rPr>
-                <a:solidFill>
-                  <a:srgbClr val="4758AB"/>
-                </a:solidFill>
-                <a:latin typeface="Courier"/>
-              </a:rPr>
-              <a:t>geom_point</a:t>
-            </a:r>
-            <a:r>
-              <a:rPr>
-                <a:solidFill>
-                  <a:srgbClr val="003B4F"/>
-                </a:solidFill>
-                <a:latin typeface="Courier"/>
-              </a:rPr>
-              <a:t>(</a:t>
-            </a:r>
-            <a:r>
-              <a:rPr>
-                <a:solidFill>
-                  <a:srgbClr val="657422"/>
-                </a:solidFill>
-                <a:latin typeface="Courier"/>
-              </a:rPr>
-              <a:t>alpha =</a:t>
-            </a:r>
-            <a:r>
-              <a:rPr>
-                <a:solidFill>
-                  <a:srgbClr val="003B4F"/>
-                </a:solidFill>
-                <a:latin typeface="Courier"/>
-              </a:rPr>
-              <a:t> </a:t>
-            </a:r>
-            <a:r>
-              <a:rPr>
-                <a:solidFill>
-                  <a:srgbClr val="AD0000"/>
-                </a:solidFill>
-                <a:latin typeface="Courier"/>
-              </a:rPr>
-              <a:t>0.5</a:t>
-            </a:r>
-            <a:r>
-              <a:rPr>
-                <a:solidFill>
-                  <a:srgbClr val="003B4F"/>
-                </a:solidFill>
-                <a:latin typeface="Courier"/>
-              </a:rPr>
-              <a:t>) </a:t>
-            </a:r>
-            <a:r>
-              <a:rPr>
-                <a:solidFill>
-                  <a:srgbClr val="5E5E5E"/>
-                </a:solidFill>
-                <a:latin typeface="Courier"/>
-              </a:rPr>
-              <a:t>+</a:t>
-            </a:r>
-            <a:br/>
-            <a:r>
-              <a:rPr>
-                <a:solidFill>
-                  <a:srgbClr val="003B4F"/>
-                </a:solidFill>
-                <a:latin typeface="Courier"/>
-              </a:rPr>
-              <a:t>  </a:t>
-            </a:r>
-            <a:r>
-              <a:rPr>
-                <a:solidFill>
-                  <a:srgbClr val="4758AB"/>
-                </a:solidFill>
-                <a:latin typeface="Courier"/>
-              </a:rPr>
-              <a:t>geom_hline</a:t>
-            </a:r>
-            <a:r>
-              <a:rPr>
-                <a:solidFill>
-                  <a:srgbClr val="003B4F"/>
-                </a:solidFill>
-                <a:latin typeface="Courier"/>
-              </a:rPr>
-              <a:t>(</a:t>
-            </a:r>
-            <a:r>
-              <a:rPr>
-                <a:solidFill>
-                  <a:srgbClr val="657422"/>
-                </a:solidFill>
-                <a:latin typeface="Courier"/>
-              </a:rPr>
-              <a:t>yintercept =</a:t>
-            </a:r>
-            <a:r>
-              <a:rPr>
-                <a:solidFill>
-                  <a:srgbClr val="003B4F"/>
-                </a:solidFill>
-                <a:latin typeface="Courier"/>
-              </a:rPr>
-              <a:t> </a:t>
-            </a:r>
-            <a:r>
-              <a:rPr>
-                <a:solidFill>
-                  <a:srgbClr val="AD0000"/>
-                </a:solidFill>
-                <a:latin typeface="Courier"/>
-              </a:rPr>
-              <a:t>0</a:t>
-            </a:r>
-            <a:r>
-              <a:rPr>
-                <a:solidFill>
-                  <a:srgbClr val="003B4F"/>
-                </a:solidFill>
-                <a:latin typeface="Courier"/>
-              </a:rPr>
-              <a:t>, </a:t>
-            </a:r>
-            <a:r>
-              <a:rPr>
-                <a:solidFill>
-                  <a:srgbClr val="657422"/>
-                </a:solidFill>
-                <a:latin typeface="Courier"/>
-              </a:rPr>
-              <a:t>linetype =</a:t>
-            </a:r>
-            <a:r>
-              <a:rPr>
-                <a:solidFill>
-                  <a:srgbClr val="003B4F"/>
-                </a:solidFill>
-                <a:latin typeface="Courier"/>
-              </a:rPr>
-              <a:t> </a:t>
-            </a:r>
-            <a:r>
-              <a:rPr>
-                <a:solidFill>
-                  <a:srgbClr val="20794D"/>
-                </a:solidFill>
-                <a:latin typeface="Courier"/>
-              </a:rPr>
-              <a:t>"dashed"</a:t>
-            </a:r>
-            <a:r>
-              <a:rPr>
-                <a:solidFill>
-                  <a:srgbClr val="003B4F"/>
-                </a:solidFill>
-                <a:latin typeface="Courier"/>
-              </a:rPr>
-              <a:t>, </a:t>
-            </a:r>
-            <a:r>
-              <a:rPr>
-                <a:solidFill>
-                  <a:srgbClr val="657422"/>
-                </a:solidFill>
-                <a:latin typeface="Courier"/>
-              </a:rPr>
-              <a:t>color =</a:t>
-            </a:r>
-            <a:r>
-              <a:rPr>
-                <a:solidFill>
-                  <a:srgbClr val="003B4F"/>
-                </a:solidFill>
-                <a:latin typeface="Courier"/>
-              </a:rPr>
-              <a:t> </a:t>
-            </a:r>
-            <a:r>
-              <a:rPr>
-                <a:solidFill>
-                  <a:srgbClr val="20794D"/>
-                </a:solidFill>
-                <a:latin typeface="Courier"/>
-              </a:rPr>
-              <a:t>"red"</a:t>
-            </a:r>
-            <a:r>
-              <a:rPr>
-                <a:solidFill>
-                  <a:srgbClr val="003B4F"/>
-                </a:solidFill>
-                <a:latin typeface="Courier"/>
-              </a:rPr>
-              <a:t>) </a:t>
-            </a:r>
-            <a:r>
-              <a:rPr>
-                <a:solidFill>
-                  <a:srgbClr val="5E5E5E"/>
-                </a:solidFill>
-                <a:latin typeface="Courier"/>
-              </a:rPr>
-              <a:t>+</a:t>
-            </a:r>
-            <a:br/>
-            <a:r>
-              <a:rPr>
-                <a:solidFill>
-                  <a:srgbClr val="003B4F"/>
-                </a:solidFill>
-                <a:latin typeface="Courier"/>
-              </a:rPr>
-              <a:t>  </a:t>
-            </a:r>
-            <a:r>
-              <a:rPr>
-                <a:solidFill>
-                  <a:srgbClr val="4758AB"/>
-                </a:solidFill>
-                <a:latin typeface="Courier"/>
-              </a:rPr>
-              <a:t>labs</a:t>
-            </a:r>
-            <a:r>
-              <a:rPr>
-                <a:solidFill>
-                  <a:srgbClr val="003B4F"/>
-                </a:solidFill>
-                <a:latin typeface="Courier"/>
-              </a:rPr>
-              <a:t>(</a:t>
-            </a:r>
-            <a:r>
-              <a:rPr>
-                <a:solidFill>
-                  <a:srgbClr val="657422"/>
-                </a:solidFill>
-                <a:latin typeface="Courier"/>
-              </a:rPr>
-              <a:t>x =</a:t>
-            </a:r>
-            <a:r>
-              <a:rPr>
-                <a:solidFill>
-                  <a:srgbClr val="003B4F"/>
-                </a:solidFill>
-                <a:latin typeface="Courier"/>
-              </a:rPr>
-              <a:t> </a:t>
-            </a:r>
-            <a:r>
-              <a:rPr>
-                <a:solidFill>
-                  <a:srgbClr val="20794D"/>
-                </a:solidFill>
-                <a:latin typeface="Courier"/>
-              </a:rPr>
-              <a:t>"Fitted Values (cm²)"</a:t>
-            </a:r>
-            <a:r>
-              <a:rPr>
-                <a:solidFill>
-                  <a:srgbClr val="003B4F"/>
-                </a:solidFill>
-                <a:latin typeface="Courier"/>
-              </a:rPr>
-              <a:t>, </a:t>
-            </a:r>
-            <a:r>
-              <a:rPr>
-                <a:solidFill>
-                  <a:srgbClr val="657422"/>
-                </a:solidFill>
-                <a:latin typeface="Courier"/>
-              </a:rPr>
-              <a:t>y =</a:t>
-            </a:r>
-            <a:r>
-              <a:rPr>
-                <a:solidFill>
-                  <a:srgbClr val="003B4F"/>
-                </a:solidFill>
-                <a:latin typeface="Courier"/>
-              </a:rPr>
-              <a:t> </a:t>
-            </a:r>
-            <a:r>
-              <a:rPr>
-                <a:solidFill>
-                  <a:srgbClr val="20794D"/>
-                </a:solidFill>
-                <a:latin typeface="Courier"/>
-              </a:rPr>
-              <a:t>"Residuals (cm²)"</a:t>
-            </a:r>
-            <a:r>
-              <a:rPr>
-                <a:solidFill>
-                  <a:srgbClr val="003B4F"/>
-                </a:solidFill>
-                <a:latin typeface="Courier"/>
-              </a:rPr>
-              <a:t>) </a:t>
-            </a:r>
-            <a:r>
-              <a:rPr>
-                <a:solidFill>
-                  <a:srgbClr val="5E5E5E"/>
-                </a:solidFill>
-                <a:latin typeface="Courier"/>
-              </a:rPr>
-              <a:t>+</a:t>
-            </a:r>
-            <a:br/>
-            <a:r>
-              <a:rPr>
-                <a:solidFill>
-                  <a:srgbClr val="003B4F"/>
-                </a:solidFill>
-                <a:latin typeface="Courier"/>
-              </a:rPr>
-              <a:t>  </a:t>
-            </a:r>
-            <a:r>
-              <a:rPr>
-                <a:solidFill>
-                  <a:srgbClr val="4758AB"/>
-                </a:solidFill>
-                <a:latin typeface="Courier"/>
-              </a:rPr>
-              <a:t>theme_minimal</a:t>
-            </a:r>
-            <a:r>
-              <a:rPr>
-                <a:solidFill>
-                  <a:srgbClr val="003B4F"/>
-                </a:solidFill>
-                <a:latin typeface="Courier"/>
-              </a:rPr>
-              <a:t>()</a:t>
-            </a:r>
-            <a:br/>
-            <a:br/>
-            <a:r>
-              <a:rPr>
-                <a:solidFill>
-                  <a:srgbClr val="003B4F"/>
-                </a:solidFill>
-                <a:latin typeface="Courier"/>
-              </a:rPr>
-              <a:t>resid_plot</a:t>
             </a:r>
           </a:p>
         </p:txBody>
       </p:sp>
       <p:pic>
         <p:nvPicPr>
-          <p:cNvPr descr="regression_lecture_files/figure-pptx/resid-vs-fitted-05-1.png" id="0" name="Picture 1"/>
+          <p:cNvPr descr="regression_lecture_files/figure-pptx/diagnostic-plots-05-1.png" id="0" name="Picture 1"/>
           <p:cNvPicPr>
             <a:picLocks noGrp="1" noChangeAspect="1"/>
           </p:cNvPicPr>
@@ -11220,8 +10733,8 @@
         </p:blipFill>
         <p:spPr bwMode="auto">
           <a:xfrm>
-            <a:off x="127000" y="1562100"/>
-            <a:ext cx="4432300" cy="2730500"/>
+            <a:off x="685800" y="1270000"/>
+            <a:ext cx="3302000" cy="3302000"/>
           </a:xfrm>
           <a:prstGeom prst="rect">
             <a:avLst/>
@@ -11254,6 +10767,322 @@
             </a:pPr>
             <a:r>
               <a:rPr b="1"/>
+              <a:t>No extra code needed.</a:t>
+            </a:r>
+            <a:r>
+              <a:rPr/>
+              <a:t> Once you have a fitted </a:t>
+            </a:r>
+            <a:r>
+              <a:rPr>
+                <a:latin typeface="Courier"/>
+              </a:rPr>
+              <a:t>lm</a:t>
+            </a:r>
+            <a:r>
+              <a:rPr/>
+              <a:t> object, </a:t>
+            </a:r>
+            <a:r>
+              <a:rPr>
+                <a:latin typeface="Courier"/>
+              </a:rPr>
+              <a:t>plot()</a:t>
+            </a:r>
+            <a:r>
+              <a:rPr/>
+              <a:t> already knows how to diagnose it.</a:t>
+            </a:r>
+          </a:p>
+        </p:txBody>
+      </p:sp>
+      <p:graphicFrame>
+        <p:nvGraphicFramePr>
+          <p:cNvPr id="6" name="Content Placeholder 5"/>
+          <p:cNvGraphicFramePr>
+            <a:graphicFrameLocks noGrp="1"/>
+          </p:cNvGraphicFramePr>
+          <p:nvPr>
+            <p:ph idx="1"/>
+          </p:nvPr>
+        </p:nvGraphicFramePr>
+        <p:xfrm>
+          <a:off x="4749800" y="1295400"/>
+          <a:ext cx="4038600" cy="3276600"/>
+        </p:xfrm>
+        <a:graphic>
+          <a:graphicData uri="http://schemas.openxmlformats.org/drawingml/2006/table">
+            <a:tbl>
+              <a:tblPr firstRow="1" bandRow="1">
+                <a:tableStyleId>{5C22544A-7EE6-4342-B048-85BDC9FD1C3A}</a:tableStyleId>
+              </a:tblPr>
+              <a:tblGrid>
+                <a:gridCol w="1346200"/>
+                <a:gridCol w="1346200"/>
+                <a:gridCol w="1346200"/>
+              </a:tblGrid>
+              <a:tr h="0">
+                <a:tc>
+                  <a:txBody>
+                    <a:bodyPr/>
+                    <a:lstStyle/>
+                    <a:p>
+                      <a:pPr lvl="0" indent="0" marL="0">
+                        <a:buNone/>
+                      </a:pPr>
+                      <a:r>
+                        <a:rPr/>
+                        <a:t>Panel</a:t>
+                      </a:r>
+                    </a:p>
+                  </a:txBody>
+                  <a:tcPr/>
+                </a:tc>
+                <a:tc>
+                  <a:txBody>
+                    <a:bodyPr/>
+                    <a:lstStyle/>
+                    <a:p>
+                      <a:pPr lvl="0" indent="0" marL="0">
+                        <a:buNone/>
+                      </a:pPr>
+                      <a:r>
+                        <a:rPr/>
+                        <a:t>Name</a:t>
+                      </a:r>
+                    </a:p>
+                  </a:txBody>
+                  <a:tcPr/>
+                </a:tc>
+                <a:tc>
+                  <a:txBody>
+                    <a:bodyPr/>
+                    <a:lstStyle/>
+                    <a:p>
+                      <a:pPr lvl="0" indent="0" marL="0">
+                        <a:buNone/>
+                      </a:pPr>
+                      <a:r>
+                        <a:rPr/>
+                        <a:t>Checks</a:t>
+                      </a:r>
+                    </a:p>
+                  </a:txBody>
+                  <a:tcPr/>
+                </a:tc>
+              </a:tr>
+              <a:tr h="0">
+                <a:tc>
+                  <a:txBody>
+                    <a:bodyPr/>
+                    <a:lstStyle/>
+                    <a:p>
+                      <a:pPr lvl="0" indent="0" marL="0">
+                        <a:buNone/>
+                      </a:pPr>
+                      <a:r>
+                        <a:rPr/>
+                        <a:t>1</a:t>
+                      </a:r>
+                    </a:p>
+                  </a:txBody>
+                </a:tc>
+                <a:tc>
+                  <a:txBody>
+                    <a:bodyPr/>
+                    <a:lstStyle/>
+                    <a:p>
+                      <a:pPr lvl="0" indent="0" marL="0">
+                        <a:buNone/>
+                      </a:pPr>
+                      <a:r>
+                        <a:rPr/>
+                        <a:t>Residuals vs Fitted</a:t>
+                      </a:r>
+                    </a:p>
+                  </a:txBody>
+                </a:tc>
+                <a:tc>
+                  <a:txBody>
+                    <a:bodyPr/>
+                    <a:lstStyle/>
+                    <a:p>
+                      <a:pPr lvl="0" indent="0" marL="0">
+                        <a:buNone/>
+                      </a:pPr>
+                      <a:r>
+                        <a:rPr/>
+                        <a:t>linearity, equal variance</a:t>
+                      </a:r>
+                    </a:p>
+                  </a:txBody>
+                </a:tc>
+              </a:tr>
+              <a:tr h="0">
+                <a:tc>
+                  <a:txBody>
+                    <a:bodyPr/>
+                    <a:lstStyle/>
+                    <a:p>
+                      <a:pPr lvl="0" indent="0" marL="0">
+                        <a:buNone/>
+                      </a:pPr>
+                      <a:r>
+                        <a:rPr/>
+                        <a:t>2</a:t>
+                      </a:r>
+                    </a:p>
+                  </a:txBody>
+                </a:tc>
+                <a:tc>
+                  <a:txBody>
+                    <a:bodyPr/>
+                    <a:lstStyle/>
+                    <a:p>
+                      <a:pPr lvl="0" indent="0" marL="0">
+                        <a:buNone/>
+                      </a:pPr>
+                      <a:r>
+                        <a:rPr/>
+                        <a:t>Normal Q-Q</a:t>
+                      </a:r>
+                    </a:p>
+                  </a:txBody>
+                </a:tc>
+                <a:tc>
+                  <a:txBody>
+                    <a:bodyPr/>
+                    <a:lstStyle/>
+                    <a:p>
+                      <a:pPr lvl="0" indent="0" marL="0">
+                        <a:buNone/>
+                      </a:pPr>
+                      <a:r>
+                        <a:rPr/>
+                        <a:t>normality of residuals</a:t>
+                      </a:r>
+                    </a:p>
+                  </a:txBody>
+                </a:tc>
+              </a:tr>
+              <a:tr h="0">
+                <a:tc>
+                  <a:txBody>
+                    <a:bodyPr/>
+                    <a:lstStyle/>
+                    <a:p>
+                      <a:pPr lvl="0" indent="0" marL="0">
+                        <a:buNone/>
+                      </a:pPr>
+                      <a:r>
+                        <a:rPr/>
+                        <a:t>3</a:t>
+                      </a:r>
+                    </a:p>
+                  </a:txBody>
+                </a:tc>
+                <a:tc>
+                  <a:txBody>
+                    <a:bodyPr/>
+                    <a:lstStyle/>
+                    <a:p>
+                      <a:pPr lvl="0" indent="0" marL="0">
+                        <a:buNone/>
+                      </a:pPr>
+                      <a:r>
+                        <a:rPr/>
+                        <a:t>Scale-Location</a:t>
+                      </a:r>
+                    </a:p>
+                  </a:txBody>
+                </a:tc>
+                <a:tc>
+                  <a:txBody>
+                    <a:bodyPr/>
+                    <a:lstStyle/>
+                    <a:p>
+                      <a:pPr lvl="0" indent="0" marL="0">
+                        <a:buNone/>
+                      </a:pPr>
+                      <a:r>
+                        <a:rPr/>
+                        <a:t>equal variance (another view)</a:t>
+                      </a:r>
+                    </a:p>
+                  </a:txBody>
+                </a:tc>
+              </a:tr>
+              <a:tr h="0">
+                <a:tc>
+                  <a:txBody>
+                    <a:bodyPr/>
+                    <a:lstStyle/>
+                    <a:p>
+                      <a:pPr lvl="0" indent="0" marL="0">
+                        <a:buNone/>
+                      </a:pPr>
+                      <a:r>
+                        <a:rPr/>
+                        <a:t>4</a:t>
+                      </a:r>
+                    </a:p>
+                  </a:txBody>
+                </a:tc>
+                <a:tc>
+                  <a:txBody>
+                    <a:bodyPr/>
+                    <a:lstStyle/>
+                    <a:p>
+                      <a:pPr lvl="0" indent="0" marL="0">
+                        <a:buNone/>
+                      </a:pPr>
+                      <a:r>
+                        <a:rPr/>
+                        <a:t>Residuals vs Leverage</a:t>
+                      </a:r>
+                    </a:p>
+                  </a:txBody>
+                </a:tc>
+                <a:tc>
+                  <a:txBody>
+                    <a:bodyPr/>
+                    <a:lstStyle/>
+                    <a:p>
+                      <a:pPr lvl="0" indent="0" marL="0">
+                        <a:buNone/>
+                      </a:pPr>
+                      <a:r>
+                        <a:rPr/>
+                        <a:t>influential points</a:t>
+                      </a:r>
+                    </a:p>
+                  </a:txBody>
+                </a:tc>
+              </a:tr>
+            </a:tbl>
+          </a:graphicData>
+        </a:graphic>
+      </p:graphicFrame>
+      <p:sp>
+        <p:nvSpPr>
+          <p:cNvPr id="6" name="Content Placeholder 5"/>
+          <p:cNvSpPr>
+            <a:spLocks noGrp="1"/>
+          </p:cNvSpPr>
+          <p:nvPr>
+            <p:ph idx="4" sz="quarter"/>
+          </p:nvPr>
+        </p:nvSpPr>
+        <p:spPr/>
+        <p:txBody>
+          <a:bodyPr/>
+          <a:lstStyle/>
+          <a:p>
+            <a:pPr lvl="0" indent="0" marL="0">
+              <a:buNone/>
+            </a:pPr>
+            <a:r>
+              <a:rPr b="1"/>
               <a:t>What to look for:</a:t>
             </a:r>
           </a:p>
@@ -11269,7 +11098,7 @@
             </a:r>
             <a:r>
               <a:rPr/>
-              <a:t> random cloud of points centered at zero; constant spread across all fitted values</a:t>
+              <a:t> panel 1 &amp; 3 show a random flat cloud; panel 2 tracks the dashed line</a:t>
             </a:r>
           </a:p>
           <a:p>
@@ -11284,32 +11113,16 @@
             </a:r>
             <a:r>
               <a:rPr/>
-              <a:t> - Curved pattern → linearity violated - Fan shape (funnel) → unequal variance</a:t>
-            </a:r>
-          </a:p>
-          <a:p>
-            <a:pPr lvl="0"/>
+              <a:t> a curve or funnel in panel 1, or points curving away at the ends of panel 2</a:t>
+            </a:r>
+          </a:p>
+          <a:p>
+            <a:pPr lvl="0" indent="0" marL="0">
+              <a:buNone/>
+            </a:pPr>
             <a:r>
               <a:rPr/>
-              <a:t>📖 W&amp;S §17.5 p. 559 (Figure 17.5-4)</a:t>
-            </a:r>
-          </a:p>
-          <a:p>
-            <a:pPr lvl="0" indent="0" marL="1270000">
-              <a:buNone/>
-            </a:pPr>
-            <a:r>
-              <a:rPr sz="2000" b="1"/>
-              <a:t>Tip</a:t>
-            </a:r>
-          </a:p>
-          <a:p>
-            <a:pPr lvl="0" indent="0" marL="1270000">
-              <a:buNone/>
-            </a:pPr>
-            <a:r>
-              <a:rPr sz="2000"/>
-              <a:t>The residual plot is the most important diagnostic. Always check it before interpreting your results.</a:t>
+              <a:t>📖 W&amp;S §17.5 p. 557–560 (Figures 17.5-1, 17.5-4)</a:t>
             </a:r>
           </a:p>
         </p:txBody>
@@ -11348,9 +11161,12 @@
         </p:nvSpPr>
         <p:spPr>
           <a:xfrm>
-            <a:off x="139485" y="78119"/>
-            <a:ext cx="8229600" cy="607682"/>
+            <a:off x="0" y="0"/>
+            <a:ext cx="9144000" cy="602780"/>
           </a:xfrm>
+          <a:solidFill>
+            <a:srgbClr val="1A1A2E"/>
+          </a:solidFill>
         </p:spPr>
         <p:txBody>
           <a:bodyPr/>
@@ -11361,19 +11177,19 @@
             </a:pPr>
             <a:r>
               <a:rPr/>
-              <a:t>Check Assumptions — QQ Plot and Shapiro-Wilk</a:t>
+              <a:t>Confirming Normality — Shapiro-Wilk</a:t>
             </a:r>
           </a:p>
         </p:txBody>
       </p:sp>
       <p:sp>
         <p:nvSpPr>
-          <p:cNvPr id="3" name="Text Placeholder 2"/>
+          <p:cNvPr id="3" name="Content Placeholder 2"/>
           <p:cNvSpPr>
             <a:spLocks noGrp="1"/>
           </p:cNvSpPr>
           <p:nvPr>
-            <p:ph idx="1" type="body"/>
+            <p:ph idx="1" sz="half"/>
           </p:nvPr>
         </p:nvSpPr>
         <p:spPr/>
@@ -11391,45 +11207,17 @@
                 </a:solidFill>
                 <a:latin typeface="Courier"/>
               </a:rPr>
-              <a:t># QQ plot of residuals — checks normality assumption --</a:t>
+              <a:t># Shapiro-Wilk test on residuals — NOT on raw data ---</a:t>
             </a:r>
             <a:br/>
             <a:r>
               <a:rPr>
                 <a:solidFill>
-                  <a:srgbClr val="003B4F"/>
-                </a:solidFill>
-                <a:latin typeface="Courier"/>
-              </a:rPr>
-              <a:t>qq_resid_plot &lt;- paper_resid_df </a:t>
-            </a:r>
-            <a:r>
-              <a:rPr>
-                <a:solidFill>
-                  <a:srgbClr val="5E5E5E"/>
-                </a:solidFill>
-                <a:latin typeface="Courier"/>
-              </a:rPr>
-              <a:t>%&gt;%</a:t>
-            </a:r>
-            <a:br/>
-            <a:r>
-              <a:rPr>
-                <a:solidFill>
-                  <a:srgbClr val="003B4F"/>
-                </a:solidFill>
-                <a:latin typeface="Courier"/>
-              </a:rPr>
-              <a:t>  </a:t>
-            </a:r>
-            <a:r>
-              <a:rPr>
-                <a:solidFill>
                   <a:srgbClr val="4758AB"/>
                 </a:solidFill>
                 <a:latin typeface="Courier"/>
               </a:rPr>
-              <a:t>ggplot</a:t>
+              <a:t>shapiro.test</a:t>
             </a:r>
             <a:r>
               <a:rPr>
@@ -11447,446 +11235,42 @@
                 </a:solidFill>
                 <a:latin typeface="Courier"/>
               </a:rPr>
-              <a:t>aes</a:t>
-            </a:r>
-            <a:r>
-              <a:rPr>
-                <a:solidFill>
-                  <a:srgbClr val="003B4F"/>
-                </a:solidFill>
-                <a:latin typeface="Courier"/>
-              </a:rPr>
-              <a:t>(</a:t>
-            </a:r>
-            <a:r>
-              <a:rPr>
-                <a:solidFill>
-                  <a:srgbClr val="657422"/>
-                </a:solidFill>
-                <a:latin typeface="Courier"/>
-              </a:rPr>
-              <a:t>sample =</a:t>
-            </a:r>
-            <a:r>
-              <a:rPr>
-                <a:solidFill>
-                  <a:srgbClr val="003B4F"/>
-                </a:solidFill>
-                <a:latin typeface="Courier"/>
-              </a:rPr>
-              <a:t> residuals)) </a:t>
-            </a:r>
-            <a:r>
-              <a:rPr>
-                <a:solidFill>
-                  <a:srgbClr val="5E5E5E"/>
-                </a:solidFill>
-                <a:latin typeface="Courier"/>
-              </a:rPr>
-              <a:t>+</a:t>
-            </a:r>
-            <a:br/>
-            <a:r>
-              <a:rPr>
-                <a:solidFill>
-                  <a:srgbClr val="003B4F"/>
-                </a:solidFill>
-                <a:latin typeface="Courier"/>
-              </a:rPr>
-              <a:t>  </a:t>
-            </a:r>
-            <a:r>
-              <a:rPr>
-                <a:solidFill>
-                  <a:srgbClr val="4758AB"/>
-                </a:solidFill>
-                <a:latin typeface="Courier"/>
-              </a:rPr>
-              <a:t>stat_qq</a:t>
-            </a:r>
-            <a:r>
-              <a:rPr>
-                <a:solidFill>
-                  <a:srgbClr val="003B4F"/>
-                </a:solidFill>
-                <a:latin typeface="Courier"/>
-              </a:rPr>
-              <a:t>() </a:t>
-            </a:r>
-            <a:r>
-              <a:rPr>
-                <a:solidFill>
-                  <a:srgbClr val="5E5E5E"/>
-                </a:solidFill>
-                <a:latin typeface="Courier"/>
-              </a:rPr>
-              <a:t>+</a:t>
-            </a:r>
-            <a:br/>
-            <a:r>
-              <a:rPr>
-                <a:solidFill>
-                  <a:srgbClr val="003B4F"/>
-                </a:solidFill>
-                <a:latin typeface="Courier"/>
-              </a:rPr>
-              <a:t>  </a:t>
-            </a:r>
-            <a:r>
-              <a:rPr>
-                <a:solidFill>
-                  <a:srgbClr val="4758AB"/>
-                </a:solidFill>
-                <a:latin typeface="Courier"/>
-              </a:rPr>
-              <a:t>stat_qq_line</a:t>
-            </a:r>
-            <a:r>
-              <a:rPr>
-                <a:solidFill>
-                  <a:srgbClr val="003B4F"/>
-                </a:solidFill>
-                <a:latin typeface="Courier"/>
-              </a:rPr>
-              <a:t>(</a:t>
-            </a:r>
-            <a:r>
-              <a:rPr>
-                <a:solidFill>
-                  <a:srgbClr val="657422"/>
-                </a:solidFill>
-                <a:latin typeface="Courier"/>
-              </a:rPr>
-              <a:t>color =</a:t>
-            </a:r>
-            <a:r>
-              <a:rPr>
-                <a:solidFill>
-                  <a:srgbClr val="003B4F"/>
-                </a:solidFill>
-                <a:latin typeface="Courier"/>
-              </a:rPr>
-              <a:t> </a:t>
-            </a:r>
-            <a:r>
-              <a:rPr>
-                <a:solidFill>
-                  <a:srgbClr val="20794D"/>
-                </a:solidFill>
-                <a:latin typeface="Courier"/>
-              </a:rPr>
-              <a:t>"red"</a:t>
-            </a:r>
-            <a:r>
-              <a:rPr>
-                <a:solidFill>
-                  <a:srgbClr val="003B4F"/>
-                </a:solidFill>
-                <a:latin typeface="Courier"/>
-              </a:rPr>
-              <a:t>, </a:t>
-            </a:r>
-            <a:r>
-              <a:rPr>
-                <a:solidFill>
-                  <a:srgbClr val="657422"/>
-                </a:solidFill>
-                <a:latin typeface="Courier"/>
-              </a:rPr>
-              <a:t>linewidth =</a:t>
-            </a:r>
-            <a:r>
-              <a:rPr>
-                <a:solidFill>
-                  <a:srgbClr val="003B4F"/>
-                </a:solidFill>
-                <a:latin typeface="Courier"/>
-              </a:rPr>
-              <a:t> </a:t>
-            </a:r>
-            <a:r>
-              <a:rPr>
-                <a:solidFill>
-                  <a:srgbClr val="AD0000"/>
-                </a:solidFill>
-                <a:latin typeface="Courier"/>
-              </a:rPr>
-              <a:t>0.8</a:t>
-            </a:r>
-            <a:r>
-              <a:rPr>
-                <a:solidFill>
-                  <a:srgbClr val="003B4F"/>
-                </a:solidFill>
-                <a:latin typeface="Courier"/>
-              </a:rPr>
-              <a:t>) </a:t>
-            </a:r>
-            <a:r>
-              <a:rPr>
-                <a:solidFill>
-                  <a:srgbClr val="5E5E5E"/>
-                </a:solidFill>
-                <a:latin typeface="Courier"/>
-              </a:rPr>
-              <a:t>+</a:t>
-            </a:r>
-            <a:br/>
-            <a:r>
-              <a:rPr>
-                <a:solidFill>
-                  <a:srgbClr val="003B4F"/>
-                </a:solidFill>
-                <a:latin typeface="Courier"/>
-              </a:rPr>
-              <a:t>  </a:t>
-            </a:r>
-            <a:r>
-              <a:rPr>
-                <a:solidFill>
-                  <a:srgbClr val="4758AB"/>
-                </a:solidFill>
-                <a:latin typeface="Courier"/>
-              </a:rPr>
-              <a:t>labs</a:t>
-            </a:r>
-            <a:r>
-              <a:rPr>
-                <a:solidFill>
-                  <a:srgbClr val="003B4F"/>
-                </a:solidFill>
-                <a:latin typeface="Courier"/>
-              </a:rPr>
-              <a:t>(</a:t>
-            </a:r>
-            <a:br/>
-            <a:r>
-              <a:rPr>
-                <a:solidFill>
-                  <a:srgbClr val="003B4F"/>
-                </a:solidFill>
-                <a:latin typeface="Courier"/>
-              </a:rPr>
-              <a:t>    </a:t>
-            </a:r>
-            <a:r>
-              <a:rPr>
-                <a:solidFill>
-                  <a:srgbClr val="657422"/>
-                </a:solidFill>
-                <a:latin typeface="Courier"/>
-              </a:rPr>
-              <a:t>title =</a:t>
-            </a:r>
-            <a:r>
-              <a:rPr>
-                <a:solidFill>
-                  <a:srgbClr val="003B4F"/>
-                </a:solidFill>
-                <a:latin typeface="Courier"/>
-              </a:rPr>
-              <a:t> </a:t>
-            </a:r>
-            <a:r>
-              <a:rPr>
-                <a:solidFill>
-                  <a:srgbClr val="20794D"/>
-                </a:solidFill>
-                <a:latin typeface="Courier"/>
-              </a:rPr>
-              <a:t>"Normal QQ Plot of Residuals"</a:t>
-            </a:r>
-            <a:r>
-              <a:rPr>
-                <a:solidFill>
-                  <a:srgbClr val="003B4F"/>
-                </a:solidFill>
-                <a:latin typeface="Courier"/>
-              </a:rPr>
-              <a:t>,</a:t>
-            </a:r>
-            <a:br/>
-            <a:r>
-              <a:rPr>
-                <a:solidFill>
-                  <a:srgbClr val="003B4F"/>
-                </a:solidFill>
-                <a:latin typeface="Courier"/>
-              </a:rPr>
-              <a:t>    </a:t>
-            </a:r>
-            <a:r>
-              <a:rPr>
-                <a:solidFill>
-                  <a:srgbClr val="657422"/>
-                </a:solidFill>
-                <a:latin typeface="Courier"/>
-              </a:rPr>
-              <a:t>x =</a:t>
-            </a:r>
-            <a:r>
-              <a:rPr>
-                <a:solidFill>
-                  <a:srgbClr val="003B4F"/>
-                </a:solidFill>
-                <a:latin typeface="Courier"/>
-              </a:rPr>
-              <a:t> </a:t>
-            </a:r>
-            <a:r>
-              <a:rPr>
-                <a:solidFill>
-                  <a:srgbClr val="20794D"/>
-                </a:solidFill>
-                <a:latin typeface="Courier"/>
-              </a:rPr>
-              <a:t>"Theoretical Quantiles"</a:t>
-            </a:r>
-            <a:r>
-              <a:rPr>
-                <a:solidFill>
-                  <a:srgbClr val="003B4F"/>
-                </a:solidFill>
-                <a:latin typeface="Courier"/>
-              </a:rPr>
-              <a:t>,</a:t>
-            </a:r>
-            <a:br/>
-            <a:r>
-              <a:rPr>
-                <a:solidFill>
-                  <a:srgbClr val="003B4F"/>
-                </a:solidFill>
-                <a:latin typeface="Courier"/>
-              </a:rPr>
-              <a:t>    </a:t>
-            </a:r>
-            <a:r>
-              <a:rPr>
-                <a:solidFill>
-                  <a:srgbClr val="657422"/>
-                </a:solidFill>
-                <a:latin typeface="Courier"/>
-              </a:rPr>
-              <a:t>y =</a:t>
-            </a:r>
-            <a:r>
-              <a:rPr>
-                <a:solidFill>
-                  <a:srgbClr val="003B4F"/>
-                </a:solidFill>
-                <a:latin typeface="Courier"/>
-              </a:rPr>
-              <a:t> </a:t>
-            </a:r>
-            <a:r>
-              <a:rPr>
-                <a:solidFill>
-                  <a:srgbClr val="20794D"/>
-                </a:solidFill>
-                <a:latin typeface="Courier"/>
-              </a:rPr>
-              <a:t>"Sample Quantiles (residuals)"</a:t>
-            </a:r>
-            <a:br/>
-            <a:r>
-              <a:rPr>
-                <a:solidFill>
-                  <a:srgbClr val="003B4F"/>
-                </a:solidFill>
-                <a:latin typeface="Courier"/>
-              </a:rPr>
-              <a:t>  ) </a:t>
-            </a:r>
-            <a:r>
-              <a:rPr>
-                <a:solidFill>
-                  <a:srgbClr val="5E5E5E"/>
-                </a:solidFill>
-                <a:latin typeface="Courier"/>
-              </a:rPr>
-              <a:t>+</a:t>
-            </a:r>
-            <a:br/>
-            <a:r>
-              <a:rPr>
-                <a:solidFill>
-                  <a:srgbClr val="003B4F"/>
-                </a:solidFill>
-                <a:latin typeface="Courier"/>
-              </a:rPr>
-              <a:t>  </a:t>
-            </a:r>
-            <a:r>
-              <a:rPr>
-                <a:solidFill>
-                  <a:srgbClr val="4758AB"/>
-                </a:solidFill>
-                <a:latin typeface="Courier"/>
-              </a:rPr>
-              <a:t>theme_minimal</a:t>
-            </a:r>
-            <a:r>
-              <a:rPr>
-                <a:solidFill>
-                  <a:srgbClr val="003B4F"/>
-                </a:solidFill>
-                <a:latin typeface="Courier"/>
-              </a:rPr>
-              <a:t>()</a:t>
-            </a:r>
-            <a:br/>
-            <a:br/>
-            <a:r>
-              <a:rPr>
-                <a:solidFill>
-                  <a:srgbClr val="003B4F"/>
-                </a:solidFill>
-                <a:latin typeface="Courier"/>
-              </a:rPr>
-              <a:t>qq_resid_plot</a:t>
+              <a:t>residuals</a:t>
+            </a:r>
+            <a:r>
+              <a:rPr>
+                <a:solidFill>
+                  <a:srgbClr val="003B4F"/>
+                </a:solidFill>
+                <a:latin typeface="Courier"/>
+              </a:rPr>
+              <a:t>(paper_lm_model))</a:t>
+            </a:r>
+          </a:p>
+          <a:p>
+            <a:pPr lvl="0" indent="0">
+              <a:buNone/>
+            </a:pPr>
+            <a:r>
+              <a:rPr>
+                <a:latin typeface="Courier"/>
+              </a:rPr>
+              <a:t>
+    Shapiro-Wilk normality test
+data:  residuals(paper_lm_model)
+W = 0.67735, p-value = 9.425e-15</a:t>
             </a:r>
           </a:p>
         </p:txBody>
       </p:sp>
-      <p:pic>
-        <p:nvPicPr>
-          <p:cNvPr descr="regression_lecture_files/figure-pptx/qq-resid-05-1.png" id="0" name="Picture 1"/>
-          <p:cNvPicPr>
-            <a:picLocks noGrp="1" noChangeAspect="1"/>
-          </p:cNvPicPr>
-          <p:nvPr/>
-        </p:nvPicPr>
-        <p:blipFill>
-          <a:blip r:embed="rId2"/>
-          <a:stretch>
-            <a:fillRect/>
-          </a:stretch>
-        </p:blipFill>
-        <p:spPr bwMode="auto">
-          <a:xfrm>
-            <a:off x="127000" y="1562100"/>
-            <a:ext cx="4432300" cy="2730500"/>
-          </a:xfrm>
-          <a:prstGeom prst="rect">
-            <a:avLst/>
-          </a:prstGeom>
-          <a:noFill/>
-          <a:ln w="9525">
-            <a:noFill/>
-            <a:headEnd/>
-            <a:tailEnd/>
-          </a:ln>
-        </p:spPr>
-      </p:pic>
       <p:sp>
         <p:nvSpPr>
-          <p:cNvPr id="5" name="Text Placeholder 4"/>
+          <p:cNvPr id="4" name="Content Placeholder 3"/>
           <p:cNvSpPr>
             <a:spLocks noGrp="1"/>
           </p:cNvSpPr>
           <p:nvPr>
-            <p:ph idx="3" sz="quarter" type="body"/>
+            <p:ph idx="2" sz="half"/>
           </p:nvPr>
         </p:nvSpPr>
         <p:spPr/>
@@ -11894,71 +11278,6 @@
           <a:bodyPr/>
           <a:lstStyle/>
           <a:p>
-            <a:pPr lvl="0" indent="0">
-              <a:buNone/>
-            </a:pPr>
-            <a:r>
-              <a:rPr>
-                <a:solidFill>
-                  <a:srgbClr val="5E5E5E"/>
-                </a:solidFill>
-                <a:latin typeface="Courier"/>
-              </a:rPr>
-              <a:t># Shapiro-Wilk test on residuals — NOT on raw data ---</a:t>
-            </a:r>
-            <a:br/>
-            <a:r>
-              <a:rPr>
-                <a:solidFill>
-                  <a:srgbClr val="4758AB"/>
-                </a:solidFill>
-                <a:latin typeface="Courier"/>
-              </a:rPr>
-              <a:t>shapiro.test</a:t>
-            </a:r>
-            <a:r>
-              <a:rPr>
-                <a:solidFill>
-                  <a:srgbClr val="003B4F"/>
-                </a:solidFill>
-                <a:latin typeface="Courier"/>
-              </a:rPr>
-              <a:t>(</a:t>
-            </a:r>
-            <a:r>
-              <a:rPr>
-                <a:solidFill>
-                  <a:srgbClr val="4758AB"/>
-                </a:solidFill>
-                <a:latin typeface="Courier"/>
-              </a:rPr>
-              <a:t>residuals</a:t>
-            </a:r>
-            <a:r>
-              <a:rPr>
-                <a:solidFill>
-                  <a:srgbClr val="003B4F"/>
-                </a:solidFill>
-                <a:latin typeface="Courier"/>
-              </a:rPr>
-              <a:t>(paper_lm_model))</a:t>
-            </a:r>
-          </a:p>
-          <a:p>
-            <a:pPr lvl="0" indent="0">
-              <a:buNone/>
-            </a:pPr>
-            <a:r>
-              <a:rPr>
-                <a:latin typeface="Courier"/>
-              </a:rPr>
-              <a:t>
-    Shapiro-Wilk normality test
-data:  residuals(paper_lm_model)
-W = 0.67735, p-value = 9.425e-15</a:t>
-            </a:r>
-          </a:p>
-          <a:p>
             <a:pPr lvl="0" indent="0" marL="0">
               <a:buNone/>
             </a:pPr>
@@ -12006,6 +11325,21 @@
             <a:r>
               <a:rPr/>
               <a:t>-values</a:t>
+            </a:r>
+          </a:p>
+          <a:p>
+            <a:pPr lvl="0"/>
+            <a:r>
+              <a:rPr/>
+              <a:t>Use this as a </a:t>
+            </a:r>
+            <a:r>
+              <a:rPr b="1"/>
+              <a:t>formal companion</a:t>
+            </a:r>
+            <a:r>
+              <a:rPr/>
+              <a:t> to panel 2 of the diagnostic plot — not a replacement for looking at it</a:t>
             </a:r>
           </a:p>
           <a:p>
@@ -12091,7 +11425,17 @@
             </a:pPr>
             <a:r>
               <a:rPr/>
-              <a:t>Plot the calibration curve, then check the residual plot and the QQ/Shapiro test on the residuals. Predict each diagnostic before you run it.</a:t>
+              <a:t>Plot the calibration curve, then run </a:t>
+            </a:r>
+            <a:r>
+              <a:rPr>
+                <a:latin typeface="Courier"/>
+              </a:rPr>
+              <a:t>plot(model)</a:t>
+            </a:r>
+            <a:r>
+              <a:rPr/>
+              <a:t> and Shapiro-Wilk on the residuals. Predict each diagnostic before you run it.</a:t>
             </a:r>
           </a:p>
         </p:txBody>
@@ -13532,7 +12876,7 @@
                 </a:pPr>
                 <a:r>
                   <a:rPr/>
-                  <a:t>This matches our observation from Lecture 03 — shady leaves are larger!</a:t>
+                  <a:t>This matches our confirmed result from Lectures 09–10 — shady leaves are significantly heavier and, now, larger in area too!</a:t>
                 </a:r>
               </a:p>
             </p:txBody>
@@ -16112,17 +15456,44 @@
               <a:rPr b="1"/>
               <a:t>Always include:</a:t>
             </a:r>
+          </a:p>
+          <a:p>
+            <a:pPr lvl="0"/>
             <a:r>
               <a:rPr/>
-              <a:t> - F-statistic and both df - </a:t>
-            </a:r>
+              <a:t>F-statistic and both df</a:t>
+            </a:r>
+          </a:p>
+          <a:p>
+            <a:pPr lvl="0"/>
             <a:r>
               <a:rPr i="1"/>
               <a:t>p</a:t>
             </a:r>
             <a:r>
               <a:rPr/>
-              <a:t>-value (never “p = 0.000” — write “p &lt; 0.001”) - R² - The actual equation - 95% CI for the slope</a:t>
+              <a:t>-value (never “p = 0.000” — write “p &lt; 0.001”)</a:t>
+            </a:r>
+          </a:p>
+          <a:p>
+            <a:pPr lvl="0"/>
+            <a:r>
+              <a:rPr/>
+              <a:t>R²</a:t>
+            </a:r>
+          </a:p>
+          <a:p>
+            <a:pPr lvl="0"/>
+            <a:r>
+              <a:rPr/>
+              <a:t>The actual equation</a:t>
+            </a:r>
+          </a:p>
+          <a:p>
+            <a:pPr lvl="0"/>
+            <a:r>
+              <a:rPr/>
+              <a:t>95% CI for the slope</a:t>
             </a:r>
           </a:p>
           <a:p>
@@ -16480,31 +15851,11 @@
                   <a:rPr>
                     <a:latin typeface="Courier"/>
                   </a:rPr>
-                  <a:t>mutate()</a:t>
+                  <a:t>plot(model)</a:t>
                 </a:r>
                 <a:r>
                   <a:rPr/>
-                  <a:t> with </a:t>
-                </a:r>
-                <a:r>
-                  <a:rPr>
-                    <a:latin typeface="Courier"/>
-                  </a:rPr>
-                  <a:t>fitted()</a:t>
-                </a:r>
-                <a:r>
-                  <a:rPr/>
-                  <a:t> and </a:t>
-                </a:r>
-                <a:r>
-                  <a:rPr>
-                    <a:latin typeface="Courier"/>
-                  </a:rPr>
-                  <a:t>residuals()</a:t>
-                </a:r>
-                <a:r>
-                  <a:rPr/>
-                  <a:t> — add model output to a data frame</a:t>
+                  <a:t> — all four diagnostic plots in one call</a:t>
                 </a:r>
               </a:p>
               <a:p>
@@ -16601,7 +15952,7 @@
             </a:pPr>
             <a:r>
               <a:rPr b="1"/>
-              <a:t>Up next — Lecture 07:</a:t>
+              <a:t>Up next — Lecture 12:</a:t>
             </a:r>
           </a:p>
           <a:p>
@@ -16822,42 +16173,42 @@
           <a:p>
             <a:pPr lvl="0"/>
             <a:r>
-              <a:rPr sz="2000" b="1"/>
-              <a:t>Predicting first</a:t>
-            </a:r>
-            <a:r>
               <a:rPr sz="2000"/>
-              <a:t> forces your brain to </a:t>
-            </a:r>
-            <a:r>
-              <a:rPr sz="2000" i="1"/>
-              <a:t>retrieve</a:t>
-            </a:r>
+              <a:t>A guess about the sign of the slope, or the size of R², is a claim you can be proven wrong about — and being wrong is what makes the right answer stick.</a:t>
+            </a:r>
+          </a:p>
+          <a:p>
+            <a:pPr lvl="0"/>
             <a:r>
               <a:rPr sz="2000"/>
-              <a:t> what it knows — the gap between guess and answer is what makes it stick.</a:t>
+              <a:t>Typing </a:t>
+            </a:r>
+            <a:r>
+              <a:rPr sz="2000">
+                <a:latin typeface="Courier"/>
+              </a:rPr>
+              <a:t>lm(area_cm2 ~ mass_g, data = paper_df)</a:t>
+            </a:r>
+            <a:r>
+              <a:rPr sz="2000"/>
+              <a:t> yourself, instead of pasting it, is what makes you actually notice which variable sits on which side of the </a:t>
+            </a:r>
+            <a:r>
+              <a:rPr sz="2000">
+                <a:latin typeface="Courier"/>
+              </a:rPr>
+              <a:t>~</a:t>
+            </a:r>
+            <a:r>
+              <a:rPr sz="2000"/>
+              <a:t>.</a:t>
             </a:r>
           </a:p>
           <a:p>
             <a:pPr lvl="0"/>
             <a:r>
-              <a:rPr sz="2000" b="1"/>
-              <a:t>Typing by hand</a:t>
-            </a:r>
-            <a:r>
               <a:rPr sz="2000"/>
-              <a:t> builds the finger-memory and error-spotting that copy-paste skips.</a:t>
-            </a:r>
-          </a:p>
-          <a:p>
-            <a:pPr lvl="0"/>
-            <a:r>
-              <a:rPr sz="2000" b="1"/>
-              <a:t>Chunk → immediate practice</a:t>
-            </a:r>
-            <a:r>
-              <a:rPr sz="2000"/>
-              <a:t> keeps a new idea in working memory long enough to form a lasting schema.</a:t>
+              <a:t>Running each short chunk and then immediately applying it in the activity keeps the idea active in your head instead of letting it go stale between lecture and practice.</a:t>
             </a:r>
           </a:p>
         </p:txBody>
@@ -17885,7 +17236,7 @@
             </a:pPr>
             <a:r>
               <a:rPr b="1"/>
-              <a:t>Regression vs. our t-test (Lecture 04):</a:t>
+              <a:t>Regression vs. our t-test (Lectures 09–10):</a:t>
             </a:r>
           </a:p>
         </p:txBody>
@@ -18399,7 +17750,7 @@
                 <a:pPr lvl="1"/>
                 <a:r>
                   <a:rPr/>
-                  <a:t>- Makes all deviations </a:t>
+                  <a:t>Makes all deviations </a:t>
                 </a:r>
                 <a:r>
                   <a:rPr b="1"/>
@@ -18414,7 +17765,7 @@
                 <a:pPr lvl="1"/>
                 <a:r>
                   <a:rPr/>
-                  <a:t>- Penalizes </a:t>
+                  <a:t>Penalizes </a:t>
                 </a:r>
                 <a:r>
                   <a:rPr b="1"/>

--- a/docs/content/regression/regression_lecture.pptx
+++ b/docs/content/regression/regression_lecture.pptx
@@ -3375,7 +3375,7 @@
             </a:pPr>
             <a:r>
               <a:rPr/>
-              <a:t>2026-08-27</a:t>
+              <a:t>2026-09-01</a:t>
             </a:r>
           </a:p>
         </p:txBody>

--- a/docs/content/regression/regression_lecture.pptx
+++ b/docs/content/regression/regression_lecture.pptx
@@ -3375,7 +3375,7 @@
             </a:pPr>
             <a:r>
               <a:rPr/>
-              <a:t>2026-09-01</a:t>
+              <a:t>2026-09-03</a:t>
             </a:r>
           </a:p>
         </p:txBody>

--- a/docs/content/regression/regression_lecture.pptx
+++ b/docs/content/regression/regression_lecture.pptx
@@ -3375,7 +3375,7 @@
             </a:pPr>
             <a:r>
               <a:rPr/>
-              <a:t>2026-09-03</a:t>
+              <a:t>2026-09-04</a:t>
             </a:r>
           </a:p>
         </p:txBody>
